--- a/presentation/FleetOps_AI_Presentation.pptx
+++ b/presentation/FleetOps_AI_Presentation.pptx
@@ -2011,6 +2011,53 @@
           </a:p>
         </p:txBody>
       </p:sp>
+      <p:sp>
+        <p:nvSpPr>
+          <p:cNvPr id="10" name="TextBox 9"/>
+          <p:cNvSpPr txBox="1"/>
+          <p:nvPr/>
+        </p:nvSpPr>
+        <p:spPr>
+          <a:xfrm>
+            <a:off x="914400" y="4937760"/>
+            <a:ext cx="10360152" cy="1371600"/>
+          </a:xfrm>
+          <a:prstGeom prst="rect">
+            <a:avLst/>
+          </a:prstGeom>
+          <a:noFill/>
+        </p:spPr>
+        <p:txBody>
+          <a:bodyPr wrap="square">
+            <a:spAutoFit/>
+          </a:bodyPr>
+          <a:lstStyle/>
+          <a:p>
+            <a:pPr algn="ctr">
+              <a:defRPr sz="1600" b="1">
+                <a:solidFill>
+                  <a:srgbClr val="E76F51"/>
+                </a:solidFill>
+              </a:defRPr>
+            </a:pPr>
+            <a:r>
+              <a:t>Prepared by: FleetOps AI Team</a:t>
+            </a:r>
+          </a:p>
+          <a:p>
+            <a:pPr algn="ctr">
+              <a:defRPr sz="1300">
+                <a:solidFill>
+                  <a:srgbClr val="CADCFC"/>
+                </a:solidFill>
+              </a:defRPr>
+            </a:pPr>
+            <a:r>
+              <a:t>Raghad Altrisy (Project Leader)  •  Taif Alharbi (Core Member)  •  Jood Alwajeeh (Core Member)</a:t>
+            </a:r>
+          </a:p>
+        </p:txBody>
+      </p:sp>
     </p:spTree>
   </p:cSld>
   <p:clrMapOvr>
